--- a/docs/architecture-slide.pptx
+++ b/docs/architecture-slide.pptx
@@ -3097,7 +3097,7 @@
         <p:spPr>
           <a:xfrm>
             <a:off x="502920" y="274320"/>
-            <a:ext cx="10515600" cy="457200"/>
+            <a:ext cx="10332720" cy="457200"/>
           </a:xfrm>
           <a:prstGeom prst="rect">
             <a:avLst/>
@@ -3118,7 +3118,7 @@
                 </a:solidFill>
                 <a:latin typeface="Arial"/>
               </a:rPr>
-              <a:t>Foxy Audit — System Architecture</a:t>
+              <a:t>A receipt for every AI conversation</a:t>
             </a:r>
           </a:p>
         </p:txBody>
@@ -3132,7 +3132,7 @@
         <p:spPr>
           <a:xfrm>
             <a:off x="502920" y="749808"/>
-            <a:ext cx="10515600" cy="256032"/>
+            <a:ext cx="10332720" cy="256032"/>
           </a:xfrm>
           <a:prstGeom prst="rect">
             <a:avLst/>
@@ -3153,7 +3153,7 @@
                 </a:solidFill>
                 <a:latin typeface="Arial"/>
               </a:rPr>
-              <a:t>Client capture  →  content-blind backend  →  Alibaba Cloud Qwen reasoning  →  tamper-evident evidence chain</a:t>
+              <a:t>Your AI keeps working exactly as it does today. We record proof of what happened — without ever seeing what was said.</a:t>
             </a:r>
           </a:p>
         </p:txBody>
@@ -3234,7 +3234,7 @@
                 </a:solidFill>
                 <a:latin typeface="Arial"/>
               </a:rPr>
-              <a:t>Client Apps</a:t>
+              <a:t>Your AI app</a:t>
             </a:r>
           </a:p>
           <a:p>
@@ -3250,7 +3250,7 @@
                 </a:solidFill>
                 <a:latin typeface="Arial"/>
               </a:rPr>
-              <a:t>SDK + Desktop App</a:t>
+              <a:t>Where your AI talks to customers</a:t>
             </a:r>
           </a:p>
           <a:p>
@@ -3266,7 +3266,7 @@
                 </a:solidFill>
                 <a:latin typeface="Arial"/>
               </a:rPr>
-              <a:t>the only place raw prompt</a:t>
+              <a:t>or staff. The only place the</a:t>
             </a:r>
           </a:p>
           <a:p>
@@ -3282,7 +3282,7 @@
                 </a:solidFill>
                 <a:latin typeface="Arial"/>
               </a:rPr>
-              <a:t>and response text exists</a:t>
+              <a:t>words ever exist.</a:t>
             </a:r>
           </a:p>
         </p:txBody>
@@ -3363,7 +3363,7 @@
                 </a:solidFill>
                 <a:latin typeface="Arial"/>
               </a:rPr>
-              <a:t>Foxy Audit Backend</a:t>
+              <a:t>Foxy Audit</a:t>
             </a:r>
           </a:p>
           <a:p>
@@ -3379,23 +3379,7 @@
                 </a:solidFill>
                 <a:latin typeface="Arial"/>
               </a:rPr>
-              <a:t>Hosted on Google Cloud VM</a:t>
-            </a:r>
-          </a:p>
-          <a:p>
-            <a:pPr algn="ctr">
-              <a:spcBef>
-                <a:spcPts val="300"/>
-              </a:spcBef>
-            </a:pPr>
-            <a:r>
-              <a:rPr sz="850" b="0" i="0">
-                <a:solidFill>
-                  <a:srgbClr val="C9C2BC"/>
-                </a:solidFill>
-                <a:latin typeface="Arial"/>
-              </a:rPr>
-              <a:t/>
+              <a:t>Runs on Google Cloud</a:t>
             </a:r>
           </a:p>
         </p:txBody>
@@ -3476,7 +3460,7 @@
                 </a:solidFill>
                 <a:latin typeface="Arial"/>
               </a:rPr>
-              <a:t>Docker Compose · not Alibaba-hosted</a:t>
+              <a:t>we only get the fingerprint</a:t>
             </a:r>
           </a:p>
         </p:txBody>
@@ -3511,19 +3495,7 @@
                 </a:solidFill>
                 <a:latin typeface="Arial"/>
               </a:rPr>
-              <a:t>receives hashes only — it cannot</a:t>
-            </a:r>
-          </a:p>
-          <a:p>
-            <a:pPr algn="ctr"/>
-            <a:r>
-              <a:rPr sz="800" b="0" i="0">
-                <a:solidFill>
-                  <a:srgbClr val="C9C2BC"/>
-                </a:solidFill>
-                <a:latin typeface="Arial"/>
-              </a:rPr>
-              <a:t>reconstruct what was said</a:t>
+              <a:t>We never see what was said</a:t>
             </a:r>
           </a:p>
         </p:txBody>
@@ -3616,11 +3588,11 @@
             <a:r>
               <a:rPr sz="850" b="0" i="0">
                 <a:solidFill>
-                  <a:srgbClr val="A8431A"/>
+                  <a:srgbClr val="4A4A4A"/>
                 </a:solidFill>
                 <a:latin typeface="Arial"/>
               </a:rPr>
-              <a:t>Qwen · qwen-plus · DashScope API</a:t>
+              <a:t>Qwen reads each fingerprint and scores</a:t>
             </a:r>
           </a:p>
           <a:p>
@@ -3636,7 +3608,7 @@
                 </a:solidFill>
                 <a:latin typeface="Arial"/>
               </a:rPr>
-              <a:t>the agentic judge: risk scoring,</a:t>
+              <a:t>how risky it looks. If it is not sure, it</a:t>
             </a:r>
           </a:p>
           <a:p>
@@ -3652,7 +3624,7 @@
                 </a:solidFill>
                 <a:latin typeface="Arial"/>
               </a:rPr>
-              <a:t>flag_for_human_review(),</a:t>
+              <a:t>hands the case to a person — and</a:t>
             </a:r>
           </a:p>
           <a:p>
@@ -3668,7 +3640,7 @@
                 </a:solidFill>
                 <a:latin typeface="Arial"/>
               </a:rPr>
-              <a:t>check_prior_reviews()</a:t>
+              <a:t>remembers what they decided.</a:t>
             </a:r>
           </a:p>
         </p:txBody>
@@ -3749,7 +3721,7 @@
                 </a:solidFill>
                 <a:latin typeface="Arial"/>
               </a:rPr>
-              <a:t>Hash-Chain Store</a:t>
+              <a:t>The record</a:t>
             </a:r>
           </a:p>
           <a:p>
@@ -3765,7 +3737,7 @@
                 </a:solidFill>
                 <a:latin typeface="Arial"/>
               </a:rPr>
-              <a:t>PostgreSQL · per-org · row-level security</a:t>
+              <a:t>Every entry is locked to the one before it.</a:t>
             </a:r>
           </a:p>
           <a:p>
@@ -3781,7 +3753,7 @@
                 </a:solidFill>
                 <a:latin typeface="Arial"/>
               </a:rPr>
-              <a:t>sequential SHA-256, append-only</a:t>
+              <a:t>Change one and everything after it breaks.</a:t>
             </a:r>
           </a:p>
         </p:txBody>
@@ -3862,7 +3834,7 @@
                 </a:solidFill>
                 <a:latin typeface="Arial"/>
               </a:rPr>
-              <a:t>Public Blockchain Anchor</a:t>
+              <a:t>Public proof</a:t>
             </a:r>
           </a:p>
           <a:p>
@@ -3878,7 +3850,7 @@
                 </a:solidFill>
                 <a:latin typeface="Arial"/>
               </a:rPr>
-              <a:t>periodic fingerprint publication — EVM / Sepolia</a:t>
+              <a:t>A fingerprint of the record is published in</a:t>
             </a:r>
           </a:p>
           <a:p>
@@ -3894,7 +3866,7 @@
                 </a:solidFill>
                 <a:latin typeface="Arial"/>
               </a:rPr>
-              <a:t>verifiable independently of Foxy Audit servers</a:t>
+              <a:t>public, so nobody has to trust us.</a:t>
             </a:r>
           </a:p>
         </p:txBody>
@@ -3975,7 +3947,7 @@
                 </a:solidFill>
                 <a:latin typeface="Arial"/>
               </a:rPr>
-              <a:t>Review Dashboard</a:t>
+              <a:t>Human review</a:t>
             </a:r>
           </a:p>
           <a:p>
@@ -3991,7 +3963,7 @@
                 </a:solidFill>
                 <a:latin typeface="Arial"/>
               </a:rPr>
-              <a:t>human-in-the-loop escalation queue</a:t>
+              <a:t>When the AI will not decide,</a:t>
             </a:r>
           </a:p>
           <a:p>
@@ -4007,7 +3979,7 @@
                 </a:solidFill>
                 <a:latin typeface="Arial"/>
               </a:rPr>
-              <a:t>a person rules when the agent</a:t>
+              <a:t>a person does.</a:t>
             </a:r>
           </a:p>
           <a:p>
@@ -4023,7 +3995,7 @@
                 </a:solidFill>
                 <a:latin typeface="Arial"/>
               </a:rPr>
-              <a:t>declines to decide</a:t>
+              <a:t>What they decide is saved</a:t>
             </a:r>
           </a:p>
           <a:p>
@@ -4039,7 +4011,7 @@
                 </a:solidFill>
                 <a:latin typeface="Arial"/>
               </a:rPr>
-              <a:t>the ruling becomes evidence too</a:t>
+              <a:t>as proof too</a:t>
             </a:r>
           </a:p>
         </p:txBody>
@@ -4120,7 +4092,7 @@
                 </a:solidFill>
                 <a:latin typeface="Arial"/>
               </a:rPr>
-              <a:t>Compliance Passport</a:t>
+              <a:t>The report</a:t>
             </a:r>
           </a:p>
           <a:p>
@@ -4136,7 +4108,7 @@
                 </a:solidFill>
                 <a:latin typeface="Arial"/>
               </a:rPr>
-              <a:t>exportable, verifiable document</a:t>
+              <a:t>One document you can hand to</a:t>
             </a:r>
           </a:p>
           <a:p>
@@ -4152,7 +4124,7 @@
                 </a:solidFill>
                 <a:latin typeface="Arial"/>
               </a:rPr>
-              <a:t>for auditors and customers</a:t>
+              <a:t>an auditor or a customer.</a:t>
             </a:r>
           </a:p>
         </p:txBody>
@@ -4233,7 +4205,7 @@
                 </a:solidFill>
                 <a:latin typeface="Arial"/>
               </a:rPr>
-              <a:t>Independent Verifier</a:t>
+              <a:t>Check it yourself</a:t>
             </a:r>
           </a:p>
           <a:p>
@@ -4249,7 +4221,7 @@
                 </a:solidFill>
                 <a:latin typeface="Arial"/>
               </a:rPr>
-              <a:t>dependency-free script — anyone</a:t>
+              <a:t>Anyone can re-check the whole record.</a:t>
             </a:r>
           </a:p>
           <a:p>
@@ -4265,23 +4237,7 @@
                 </a:solidFill>
                 <a:latin typeface="Arial"/>
               </a:rPr>
-              <a:t>recomputes the chain and detects</a:t>
-            </a:r>
-          </a:p>
-          <a:p>
-            <a:pPr algn="ctr">
-              <a:spcBef>
-                <a:spcPts val="300"/>
-              </a:spcBef>
-            </a:pPr>
-            <a:r>
-              <a:rPr sz="850" b="0" i="0">
-                <a:solidFill>
-                  <a:srgbClr val="4A4A4A"/>
-                </a:solidFill>
-                <a:latin typeface="Arial"/>
-              </a:rPr>
-              <a:t>a single altered byte</a:t>
+              <a:t>One changed letter shows.</a:t>
             </a:r>
           </a:p>
         </p:txBody>
@@ -4362,7 +4318,7 @@
                 </a:solidFill>
                 <a:latin typeface="Arial"/>
               </a:rPr>
-              <a:t>Alibaba Cloud services used</a:t>
+              <a:t>What we use from Alibaba</a:t>
             </a:r>
           </a:p>
           <a:p>
@@ -4378,7 +4334,7 @@
                 </a:solidFill>
                 <a:latin typeface="Arial"/>
               </a:rPr>
-              <a:t>Model Studio (DashScope) API — the</a:t>
+              <a:t>Model Studio (Qwen) — the AI that</a:t>
             </a:r>
           </a:p>
           <a:p>
@@ -4394,7 +4350,7 @@
                 </a:solidFill>
                 <a:latin typeface="Arial"/>
               </a:rPr>
-              <a:t>only Alibaba service in the runtime</a:t>
+              <a:t>reviews every record.</a:t>
             </a:r>
           </a:p>
         </p:txBody>
@@ -4492,7 +4448,7 @@
                 </a:solidFill>
                 <a:latin typeface="Arial"/>
               </a:rPr>
-              <a:t>dev-time only — not part of the</a:t>
+              <a:t>used while building — not part of</a:t>
             </a:r>
           </a:p>
           <a:p>
@@ -4508,7 +4464,7 @@
                 </a:solidFill>
                 <a:latin typeface="Arial"/>
               </a:rPr>
-              <a:t>runtime architecture above</a:t>
+              <a:t>how the product runs.</a:t>
             </a:r>
           </a:p>
         </p:txBody>
@@ -4557,7 +4513,7 @@
         </p:nvSpPr>
         <p:spPr>
           <a:xfrm>
-            <a:off x="2798064" y="1609344"/>
+            <a:off x="2798064" y="1645920"/>
             <a:ext cx="1234440" cy="201168"/>
           </a:xfrm>
           <a:prstGeom prst="rect">
@@ -4579,7 +4535,7 @@
                 </a:solidFill>
                 <a:latin typeface="Arial"/>
               </a:rPr>
-              <a:t>interaction</a:t>
+              <a:t>a fingerprint</a:t>
             </a:r>
           </a:p>
         </p:txBody>
@@ -4592,8 +4548,8 @@
         </p:nvSpPr>
         <p:spPr>
           <a:xfrm>
-            <a:off x="2798064" y="1755648"/>
-            <a:ext cx="1234440" cy="201168"/>
+            <a:off x="2724912" y="2011680"/>
+            <a:ext cx="1389888" cy="201168"/>
           </a:xfrm>
           <a:prstGeom prst="rect">
             <a:avLst/>
@@ -4608,13 +4564,13 @@
           <a:p>
             <a:pPr algn="ctr"/>
             <a:r>
-              <a:rPr sz="800" b="0" i="0">
-                <a:solidFill>
-                  <a:srgbClr val="6B6B6B"/>
+              <a:rPr sz="800" b="1" i="0">
+                <a:solidFill>
+                  <a:srgbClr val="A8431A"/>
                 </a:solidFill>
                 <a:latin typeface="Arial"/>
               </a:rPr>
-              <a:t>metadata</a:t>
+              <a:t>the words</a:t>
             </a:r>
           </a:p>
         </p:txBody>
@@ -4627,8 +4583,8 @@
         </p:nvSpPr>
         <p:spPr>
           <a:xfrm>
-            <a:off x="2706624" y="2011680"/>
-            <a:ext cx="1417320" cy="201168"/>
+            <a:off x="2724912" y="2157984"/>
+            <a:ext cx="1389888" cy="201168"/>
           </a:xfrm>
           <a:prstGeom prst="rect">
             <a:avLst/>
@@ -4649,49 +4605,14 @@
                 </a:solidFill>
                 <a:latin typeface="Arial"/>
               </a:rPr>
-              <a:t>raw text never</a:t>
-            </a:r>
-          </a:p>
-        </p:txBody>
-      </p:sp>
-      <p:sp>
-        <p:nvSpPr>
-          <p:cNvPr id="31" name="TextBox 30"/>
-          <p:cNvSpPr txBox="1"/>
-          <p:nvPr/>
-        </p:nvSpPr>
-        <p:spPr>
-          <a:xfrm>
-            <a:off x="2706624" y="2157984"/>
-            <a:ext cx="1417320" cy="201168"/>
-          </a:xfrm>
-          <a:prstGeom prst="rect">
-            <a:avLst/>
-          </a:prstGeom>
-          <a:noFill/>
-        </p:spPr>
-        <p:txBody>
-          <a:bodyPr wrap="square" lIns="0" rIns="0" tIns="0" bIns="0">
-            <a:spAutoFit/>
-          </a:bodyPr>
-          <a:lstStyle/>
-          <a:p>
-            <a:pPr algn="ctr"/>
-            <a:r>
-              <a:rPr sz="800" b="1" i="0">
-                <a:solidFill>
-                  <a:srgbClr val="A8431A"/>
-                </a:solidFill>
-                <a:latin typeface="Arial"/>
-              </a:rPr>
-              <a:t>crosses here</a:t>
+              <a:t>never leave</a:t>
             </a:r>
           </a:p>
         </p:txBody>
       </p:sp>
       <p:cxnSp>
         <p:nvCxnSpPr>
-          <p:cNvPr id="32" name="Connector 31"/>
+          <p:cNvPr id="31" name="Connector 30"/>
           <p:cNvCxnSpPr/>
           <p:nvPr/>
         </p:nvCxnSpPr>
@@ -4727,13 +4648,13 @@
       </p:cxnSp>
       <p:sp>
         <p:nvSpPr>
-          <p:cNvPr id="33" name="TextBox 32"/>
+          <p:cNvPr id="32" name="TextBox 31"/>
           <p:cNvSpPr txBox="1"/>
           <p:nvPr/>
         </p:nvSpPr>
         <p:spPr>
           <a:xfrm>
-            <a:off x="6784848" y="1335024"/>
+            <a:off x="6784848" y="1353312"/>
             <a:ext cx="1097280" cy="201168"/>
           </a:xfrm>
           <a:prstGeom prst="rect">
@@ -4755,14 +4676,14 @@
                 </a:solidFill>
                 <a:latin typeface="Arial"/>
               </a:rPr>
-              <a:t>ask agent</a:t>
+              <a:t>asks the AI</a:t>
             </a:r>
           </a:p>
         </p:txBody>
       </p:sp>
       <p:cxnSp>
         <p:nvCxnSpPr>
-          <p:cNvPr id="34" name="Connector 33"/>
+          <p:cNvPr id="33" name="Connector 32"/>
           <p:cNvCxnSpPr/>
           <p:nvPr/>
         </p:nvCxnSpPr>
@@ -4796,44 +4717,9 @@
           </a:fontRef>
         </p:style>
       </p:cxnSp>
-      <p:sp>
-        <p:nvSpPr>
-          <p:cNvPr id="35" name="TextBox 34"/>
-          <p:cNvSpPr txBox="1"/>
-          <p:nvPr/>
-        </p:nvSpPr>
-        <p:spPr>
-          <a:xfrm>
-            <a:off x="6821424" y="2194560"/>
-            <a:ext cx="1051560" cy="201168"/>
-          </a:xfrm>
-          <a:prstGeom prst="rect">
-            <a:avLst/>
-          </a:prstGeom>
-          <a:noFill/>
-        </p:spPr>
-        <p:txBody>
-          <a:bodyPr wrap="square" lIns="0" rIns="0" tIns="0" bIns="0">
-            <a:spAutoFit/>
-          </a:bodyPr>
-          <a:lstStyle/>
-          <a:p>
-            <a:pPr algn="ctr"/>
-            <a:r>
-              <a:rPr sz="800" b="0" i="0">
-                <a:solidFill>
-                  <a:srgbClr val="6B6B6B"/>
-                </a:solidFill>
-                <a:latin typeface="Arial"/>
-              </a:rPr>
-              <a:t>append record</a:t>
-            </a:r>
-          </a:p>
-        </p:txBody>
-      </p:sp>
       <p:cxnSp>
         <p:nvCxnSpPr>
-          <p:cNvPr id="36" name="Connector 35"/>
+          <p:cNvPr id="34" name="Connector 33"/>
           <p:cNvCxnSpPr/>
           <p:nvPr/>
         </p:nvCxnSpPr>
@@ -4869,13 +4755,13 @@
       </p:cxnSp>
       <p:sp>
         <p:nvSpPr>
-          <p:cNvPr id="37" name="TextBox 36"/>
+          <p:cNvPr id="35" name="TextBox 34"/>
           <p:cNvSpPr txBox="1"/>
           <p:nvPr/>
         </p:nvSpPr>
         <p:spPr>
           <a:xfrm>
-            <a:off x="3611880" y="3054096"/>
+            <a:off x="3566160" y="3072384"/>
             <a:ext cx="1691640" cy="201168"/>
           </a:xfrm>
           <a:prstGeom prst="rect">
@@ -4897,156 +4783,14 @@
                 </a:solidFill>
                 <a:latin typeface="Arial"/>
               </a:rPr>
-              <a:t>escalate when</a:t>
-            </a:r>
-          </a:p>
-        </p:txBody>
-      </p:sp>
-      <p:sp>
-        <p:nvSpPr>
-          <p:cNvPr id="38" name="TextBox 37"/>
-          <p:cNvSpPr txBox="1"/>
-          <p:nvPr/>
-        </p:nvSpPr>
-        <p:spPr>
-          <a:xfrm>
-            <a:off x="3611880" y="3200400"/>
-            <a:ext cx="1691640" cy="201168"/>
-          </a:xfrm>
-          <a:prstGeom prst="rect">
-            <a:avLst/>
-          </a:prstGeom>
-          <a:noFill/>
-        </p:spPr>
-        <p:txBody>
-          <a:bodyPr wrap="square" lIns="0" rIns="0" tIns="0" bIns="0">
-            <a:spAutoFit/>
-          </a:bodyPr>
-          <a:lstStyle/>
-          <a:p>
-            <a:pPr algn="r"/>
-            <a:r>
-              <a:rPr sz="800" b="0" i="0">
-                <a:solidFill>
-                  <a:srgbClr val="A8431A"/>
-                </a:solidFill>
-                <a:latin typeface="Arial"/>
-              </a:rPr>
-              <a:t>unresolved</a:t>
+              <a:t>when it is not sure</a:t>
             </a:r>
           </a:p>
         </p:txBody>
       </p:sp>
       <p:cxnSp>
         <p:nvCxnSpPr>
-          <p:cNvPr id="39" name="Connector 38"/>
-          <p:cNvCxnSpPr/>
-          <p:nvPr/>
-        </p:nvCxnSpPr>
-        <p:spPr>
-          <a:xfrm flipV="1">
-            <a:off x="6812280" y="2542032"/>
-            <a:ext cx="1069847" cy="1371600"/>
-          </a:xfrm>
-          <a:prstGeom prst="line">
-            <a:avLst/>
-          </a:prstGeom>
-          <a:ln w="19050">
-            <a:solidFill>
-              <a:srgbClr val="D2601F"/>
-            </a:solidFill>
-            <a:prstDash val="dash"/>
-            <a:tailEnd type="triangle" w="med" len="med"/>
-          </a:ln>
-        </p:spPr>
-        <p:style>
-          <a:lnRef idx="2">
-            <a:schemeClr val="accent1"/>
-          </a:lnRef>
-          <a:fillRef idx="0">
-            <a:schemeClr val="accent1"/>
-          </a:fillRef>
-          <a:effectRef idx="1">
-            <a:schemeClr val="accent1"/>
-          </a:effectRef>
-          <a:fontRef idx="minor">
-            <a:schemeClr val="tx1"/>
-          </a:fontRef>
-        </p:style>
-      </p:cxnSp>
-      <p:sp>
-        <p:nvSpPr>
-          <p:cNvPr id="40" name="TextBox 39"/>
-          <p:cNvSpPr txBox="1"/>
-          <p:nvPr/>
-        </p:nvSpPr>
-        <p:spPr>
-          <a:xfrm>
-            <a:off x="6309360" y="3218688"/>
-            <a:ext cx="1005840" cy="201168"/>
-          </a:xfrm>
-          <a:prstGeom prst="rect">
-            <a:avLst/>
-          </a:prstGeom>
-          <a:noFill/>
-        </p:spPr>
-        <p:txBody>
-          <a:bodyPr wrap="square" lIns="0" rIns="0" tIns="0" bIns="0">
-            <a:spAutoFit/>
-          </a:bodyPr>
-          <a:lstStyle/>
-          <a:p>
-            <a:pPr algn="ctr"/>
-            <a:r>
-              <a:rPr sz="800" b="0" i="0">
-                <a:solidFill>
-                  <a:srgbClr val="A8431A"/>
-                </a:solidFill>
-                <a:latin typeface="Arial"/>
-              </a:rPr>
-              <a:t>agent later</a:t>
-            </a:r>
-          </a:p>
-        </p:txBody>
-      </p:sp>
-      <p:sp>
-        <p:nvSpPr>
-          <p:cNvPr id="41" name="TextBox 40"/>
-          <p:cNvSpPr txBox="1"/>
-          <p:nvPr/>
-        </p:nvSpPr>
-        <p:spPr>
-          <a:xfrm>
-            <a:off x="6309360" y="3364992"/>
-            <a:ext cx="1005840" cy="201168"/>
-          </a:xfrm>
-          <a:prstGeom prst="rect">
-            <a:avLst/>
-          </a:prstGeom>
-          <a:noFill/>
-        </p:spPr>
-        <p:txBody>
-          <a:bodyPr wrap="square" lIns="0" rIns="0" tIns="0" bIns="0">
-            <a:spAutoFit/>
-          </a:bodyPr>
-          <a:lstStyle/>
-          <a:p>
-            <a:pPr algn="ctr"/>
-            <a:r>
-              <a:rPr sz="800" b="0" i="0">
-                <a:solidFill>
-                  <a:srgbClr val="A8431A"/>
-                </a:solidFill>
-                <a:latin typeface="Arial"/>
-              </a:rPr>
-              <a:t>cites ruling</a:t>
-            </a:r>
-          </a:p>
-        </p:txBody>
-      </p:sp>
-      <p:cxnSp>
-        <p:nvCxnSpPr>
-          <p:cNvPr id="42" name="Connector 41"/>
+          <p:cNvPr id="36" name="Connector 35"/>
           <p:cNvCxnSpPr/>
           <p:nvPr/>
         </p:nvCxnSpPr>
@@ -5082,7 +4826,7 @@
       </p:cxnSp>
       <p:sp>
         <p:nvSpPr>
-          <p:cNvPr id="43" name="TextBox 42"/>
+          <p:cNvPr id="37" name="TextBox 36"/>
           <p:cNvSpPr txBox="1"/>
           <p:nvPr/>
         </p:nvSpPr>
@@ -5110,14 +4854,14 @@
                 </a:solidFill>
                 <a:latin typeface="Arial"/>
               </a:rPr>
-              <a:t>periodic anchor</a:t>
+              <a:t>published</a:t>
             </a:r>
           </a:p>
         </p:txBody>
       </p:sp>
       <p:cxnSp>
         <p:nvCxnSpPr>
-          <p:cNvPr id="44" name="Connector 43"/>
+          <p:cNvPr id="38" name="Connector 37"/>
           <p:cNvCxnSpPr/>
           <p:nvPr/>
         </p:nvCxnSpPr>
@@ -5153,14 +4897,14 @@
       </p:cxnSp>
       <p:sp>
         <p:nvSpPr>
-          <p:cNvPr id="45" name="TextBox 44"/>
+          <p:cNvPr id="39" name="TextBox 38"/>
           <p:cNvSpPr txBox="1"/>
           <p:nvPr/>
         </p:nvSpPr>
         <p:spPr>
           <a:xfrm>
-            <a:off x="3108960" y="2542032"/>
-            <a:ext cx="914400" cy="201168"/>
+            <a:off x="3090672" y="2578608"/>
+            <a:ext cx="960120" cy="201168"/>
           </a:xfrm>
           <a:prstGeom prst="rect">
             <a:avLst/>
@@ -5181,14 +4925,14 @@
                 </a:solidFill>
                 <a:latin typeface="Arial"/>
               </a:rPr>
-              <a:t>export</a:t>
+              <a:t>creates</a:t>
             </a:r>
           </a:p>
         </p:txBody>
       </p:sp>
       <p:cxnSp>
         <p:nvCxnSpPr>
-          <p:cNvPr id="46" name="Connector 45"/>
+          <p:cNvPr id="40" name="Connector 39"/>
           <p:cNvCxnSpPr/>
           <p:nvPr/>
         </p:nvCxnSpPr>
@@ -5224,7 +4968,7 @@
       </p:cxnSp>
       <p:sp>
         <p:nvSpPr>
-          <p:cNvPr id="47" name="TextBox 46"/>
+          <p:cNvPr id="41" name="TextBox 40"/>
           <p:cNvSpPr txBox="1"/>
           <p:nvPr/>
         </p:nvSpPr>
@@ -5252,20 +4996,20 @@
                 </a:solidFill>
                 <a:latin typeface="Arial"/>
               </a:rPr>
-              <a:t>verify</a:t>
+              <a:t>check</a:t>
             </a:r>
           </a:p>
         </p:txBody>
       </p:sp>
       <p:cxnSp>
         <p:nvCxnSpPr>
-          <p:cNvPr id="48" name="Connector 47"/>
+          <p:cNvPr id="42" name="Connector 41"/>
           <p:cNvCxnSpPr/>
           <p:nvPr/>
         </p:nvCxnSpPr>
         <p:spPr>
           <a:xfrm>
-            <a:off x="530352" y="6053328"/>
+            <a:off x="530352" y="6309360"/>
             <a:ext cx="548640" cy="0"/>
           </a:xfrm>
           <a:prstGeom prst="line">
@@ -5294,14 +5038,14 @@
       </p:cxnSp>
       <p:sp>
         <p:nvSpPr>
-          <p:cNvPr id="49" name="TextBox 48"/>
+          <p:cNvPr id="43" name="TextBox 42"/>
           <p:cNvSpPr txBox="1"/>
           <p:nvPr/>
         </p:nvSpPr>
         <p:spPr>
           <a:xfrm>
-            <a:off x="1170432" y="5971032"/>
-            <a:ext cx="1005840" cy="201168"/>
+            <a:off x="1170432" y="6227064"/>
+            <a:ext cx="1188720" cy="201168"/>
           </a:xfrm>
           <a:prstGeom prst="rect">
             <a:avLst/>
@@ -5322,20 +5066,20 @@
                 </a:solidFill>
                 <a:latin typeface="Arial"/>
               </a:rPr>
-              <a:t>data flow</a:t>
+              <a:t>normal flow</a:t>
             </a:r>
           </a:p>
         </p:txBody>
       </p:sp>
       <p:cxnSp>
         <p:nvCxnSpPr>
-          <p:cNvPr id="50" name="Connector 49"/>
+          <p:cNvPr id="44" name="Connector 43"/>
           <p:cNvCxnSpPr/>
           <p:nvPr/>
         </p:nvCxnSpPr>
         <p:spPr>
           <a:xfrm>
-            <a:off x="2240280" y="6053328"/>
+            <a:off x="2514600" y="6309360"/>
             <a:ext cx="548640" cy="0"/>
           </a:xfrm>
           <a:prstGeom prst="line">
@@ -5364,14 +5108,14 @@
       </p:cxnSp>
       <p:sp>
         <p:nvSpPr>
-          <p:cNvPr id="51" name="TextBox 50"/>
+          <p:cNvPr id="45" name="TextBox 44"/>
           <p:cNvSpPr txBox="1"/>
           <p:nvPr/>
         </p:nvSpPr>
         <p:spPr>
           <a:xfrm>
-            <a:off x="2880360" y="5971032"/>
-            <a:ext cx="1691640" cy="201168"/>
+            <a:off x="3154680" y="6227064"/>
+            <a:ext cx="2194560" cy="201168"/>
           </a:xfrm>
           <a:prstGeom prst="rect">
             <a:avLst/>
@@ -5392,21 +5136,21 @@
                 </a:solidFill>
                 <a:latin typeface="Arial"/>
               </a:rPr>
-              <a:t>agent / escalation flow</a:t>
-            </a:r>
-          </a:p>
-        </p:txBody>
-      </p:sp>
-      <p:sp>
-        <p:nvSpPr>
-          <p:cNvPr id="52" name="TextBox 51"/>
+              <a:t>when a person is needed</a:t>
+            </a:r>
+          </a:p>
+        </p:txBody>
+      </p:sp>
+      <p:sp>
+        <p:nvSpPr>
+          <p:cNvPr id="46" name="TextBox 45"/>
           <p:cNvSpPr txBox="1"/>
           <p:nvPr/>
         </p:nvSpPr>
         <p:spPr>
           <a:xfrm>
-            <a:off x="502920" y="6327648"/>
-            <a:ext cx="10607040" cy="402336"/>
+            <a:off x="5852160" y="6227064"/>
+            <a:ext cx="5303520" cy="219456"/>
           </a:xfrm>
           <a:prstGeom prst="rect">
             <a:avLst/>
@@ -5427,30 +5171,14 @@
                 </a:solidFill>
                 <a:latin typeface="Arial"/>
               </a:rPr>
-              <a:t>Hosting is Google Cloud, not Alibaba Cloud. The Alibaba Cloud service this project uses is Model Studio (DashScope), which powers the agentic judge above.</a:t>
-            </a:r>
-          </a:p>
-          <a:p>
-            <a:pPr>
-              <a:spcBef>
-                <a:spcPts val="200"/>
-              </a:spcBef>
-            </a:pPr>
-            <a:r>
-              <a:rPr sz="800" b="0" i="0">
-                <a:solidFill>
-                  <a:srgbClr val="6B6B6B"/>
-                </a:solidFill>
-                <a:latin typeface="Arial"/>
-              </a:rPr>
-              <a:t>Gemini and GPT-5.6 are supported as alternative judges and are unkeyed on this deployment, so every live verdict comes from Qwen.</a:t>
+              <a:t>Runs on Google Cloud. The AI reasoning comes from Alibaba Cloud Model Studio (Qwen).</a:t>
             </a:r>
           </a:p>
         </p:txBody>
       </p:sp>
       <p:pic>
         <p:nvPicPr>
-          <p:cNvPr id="53" name="Picture 52" descr="Logo Transparent.png"/>
+          <p:cNvPr id="47" name="Picture 46" descr="Logo Transparent.png"/>
           <p:cNvPicPr>
             <a:picLocks noChangeAspect="1"/>
           </p:cNvPicPr>
